--- a/decks/geog-glaciers/geog-glaciers_ch4_erosion-landforms.pptx
+++ b/decks/geog-glaciers/geog-glaciers_ch4_erosion-landforms.pptx
@@ -127,30 +127,30 @@
   <p:extLst>
     <p:ext uri="{521415D9-36F7-43E2-AB2F-B90AF26B5E84}">
       <p14:sectionLst xmlns:p14="http://schemas.microsoft.com/office/powerpoint/2010/main">
-        <p14:section name="Opening" id="{63c52d2c-f4b8-81d2-8bd9-803c06205b59}">
+        <p14:section name="Opening" id="{9de86528-ef1f-8099-7e4a-fd8ad16fc688}">
           <p14:sldIdLst>
             <p14:sldId id="256"/>
           </p14:sldIdLst>
         </p14:section>
-        <p14:section name="Gate" id="{4239aa8d-df43-9160-bc66-6e3967c1e4d5}">
+        <p14:section name="Gate" id="{4e513e93-2ac5-7b90-762b-5952112a3632}">
           <p14:sldIdLst>
             <p14:sldId id="257"/>
             <p14:sldId id="258"/>
           </p14:sldIdLst>
         </p14:section>
-        <p14:section name="Pre-teach" id="{50ea9bad-7193-d2c3-55cc-e353b7c94a0b}">
+        <p14:section name="Pre-teach" id="{aa716296-c31e-385c-4d0d-2ae645dd199a}">
           <p14:sldIdLst>
             <p14:sldId id="259"/>
             <p14:sldId id="260"/>
           </p14:sldIdLst>
         </p14:section>
-        <p14:section name="Read-along" id="{dd64b804-fe64-f3bd-679a-43a453116cb5}">
+        <p14:section name="Read-along" id="{a4a4e24a-9ad8-aabc-3c88-959153d0770c}">
           <p14:sldIdLst>
             <p14:sldId id="261"/>
             <p14:sldId id="262"/>
           </p14:sldIdLst>
         </p14:section>
-        <p14:section name="Teach" id="{e68e14d1-c0f5-f10a-40ca-ca1156ac06a6}">
+        <p14:section name="Teach" id="{77611ac5-cf16-7ee9-3d2c-6f9e4bcfdd8d}">
           <p14:sldIdLst>
             <p14:sldId id="263"/>
             <p14:sldId id="264"/>
@@ -159,7 +159,7 @@
             <p14:sldId id="267"/>
           </p14:sldIdLst>
         </p14:section>
-        <p14:section name="Routes" id="{a5e0b68a-c0a2-fff9-cd25-ec0f71ae0c6d}">
+        <p14:section name="Routes" id="{039f80e3-c250-bf88-be3b-cbaeef5fc81e}">
           <p14:sldIdLst>
             <p14:sldId id="268"/>
             <p14:sldId id="269"/>
@@ -168,12 +168,12 @@
             <p14:sldId id="272"/>
           </p14:sldIdLst>
         </p14:section>
-        <p14:section name="Close" id="{a595d8ed-fed4-7d23-070e-25bf8a498e66}">
+        <p14:section name="Close" id="{040a7fbb-fbc3-4d19-82ad-5a257357dcc9}">
           <p14:sldIdLst>
             <p14:sldId id="273"/>
           </p14:sldIdLst>
         </p14:section>
-        <p14:section name="Answers" id="{b8eefc40-309c-8284-724f-b192430284cc}">
+        <p14:section name="Answers" id="{fa399dc7-345d-d403-b994-2a78d0a85fdc}">
           <p14:sldIdLst>
             <p14:sldId id="274"/>
             <p14:sldId id="275"/>
@@ -1425,7 +1425,7 @@
               <a:rPr lang="en-US" dirty="0"/>
               <a:t>Exit ticket — individual, silent, on a slip or mini-whiteboard. Recall before help: no notes, no lanes, no hints. Collect before pupils leave.
 Question: What is a corrie?
-Answer: D   An armchair-shaped hollow with a steep back wall on the side of a mountain. A corrie is a rounded, armchair-shaped hollow with a steep back wall, carved into a mountainside by a glacier.
+Answer: B   An armchair-shaped hollow with a steep back wall, carved high on a mountainside. A corrie is a rounded, armchair-shaped hollow with a steep back wall, carved into a mountainside by a glacier.
 Source of this question: gate item 1 re-asked (options rotated) — this chapter has no third quick-check module.
 The ebook also holds task 3, "From hollow to peak", for homework or the next lesson's do now.
 Sort the slips: correct → ready to move on; incorrect → start next lesson in the pre-teach group, with the read-along and the Support lane. Same destination next time.</a:t>
@@ -1608,7 +1608,7 @@
             <a:r>
               <a:rPr lang="en-US" dirty="0"/>
               <a:t>Do now — retrieval. Silent, no notes, no help: recall comes before any support. Give about four minutes.
-1. What is a corrie?  →  A   An armchair-shaped hollow with a steep back wall on the side of a mountain
+1. What is a corrie?  →  C   An armchair-shaped hollow with a steep back wall, carved high on a mountainside
 2. What is the smallest number of corries that must cut back into a mountain to leave a pyramidal peak?  →  3 corries
 3. A lake that forms in the bottom of a corrie is called a ___.  →  tarn
 Circulate: who gets 3/3 (Stretch route), 2/3 (Core), 0–1 (Support)? Use this to route pupils later in the lesson.</a:t>
@@ -1791,7 +1791,7 @@
             <a:r>
               <a:rPr lang="en-US" dirty="0"/>
               <a:t>Answers — exit ticket: Exit ticket. Reveal the answer; pupils mark their own work in a different colour, then read the "why" together. Same destination for every lane, so one answer serves the whole class.
-Answer: D   An armchair-shaped hollow with a steep back wall on the side of a mountain
+Answer: B   An armchair-shaped hollow with a steep back wall, carved high on a mountainside
 Why: A corrie is a rounded, armchair-shaped hollow with a steep back wall, carved into a mountainside by a glacier.
 Ask a Support pupil to explain one step, and a Stretch pupil to share their extension.</a:t>
             </a:r>
@@ -1882,7 +1882,7 @@
             <a:r>
               <a:rPr lang="en-US" dirty="0"/>
               <a:t>Answers — pupils mark their own in a different colour, then hands up for 3/3, 2/3, 1/3.
-1. A   An armchair-shaped hollow with a steep back wall on the side of a mountain. A corrie is a rounded, armchair-shaped hollow with a steep back wall, carved into a mountainside by a glacier.
+1. C   An armchair-shaped hollow with a steep back wall, carved high on a mountainside. A corrie is a rounded, armchair-shaped hollow with a steep back wall, carved into a mountainside by a glacier.
 2. 3 corries. A pyramidal peak forms where three or more corries cut backwards into the same mountain, so their back walls meet in a point.
 3. tarn. When the ice melts, water gathers on the scooped-out floor of the corrie, held in by the rock lip at the front. This lake is a tarn.
 Say the route each score points to: 3/3 Stretch, 2/3 Core, 0–1 Support. Pupils may choose to move up.</a:t>
@@ -10586,7 +10586,7 @@
                 <a:ea typeface="Calibri" pitchFamily="34" charset="-122"/>
                 <a:cs typeface="Calibri" pitchFamily="34" charset="-120"/>
               </a:rPr>
-              <a:t>A pointed peak where three hollows meet</a:t>
+              <a:t>A knife-edged ridge between two hollows</a:t>
             </a:r>
             <a:endParaRPr lang="en-US" sz="2400" dirty="0"/>
           </a:p>
@@ -10623,7 +10623,7 @@
                 <a:ea typeface="Calibri" pitchFamily="34" charset="-122"/>
                 <a:cs typeface="Calibri" pitchFamily="34" charset="-120"/>
               </a:rPr>
-              <a:t>A knife-edged ridge between two hollows</a:t>
+              <a:t>An armchair-shaped hollow with a steep back wall, carved high on a mountainside</a:t>
             </a:r>
             <a:endParaRPr lang="en-US" sz="2400" dirty="0"/>
           </a:p>
@@ -10697,7 +10697,7 @@
                 <a:ea typeface="Calibri" pitchFamily="34" charset="-122"/>
                 <a:cs typeface="Calibri" pitchFamily="34" charset="-120"/>
               </a:rPr>
-              <a:t>An armchair-shaped hollow with a steep back wall on the side of a mountain</a:t>
+              <a:t>A pointed peak where three hollows meet</a:t>
             </a:r>
             <a:endParaRPr lang="en-US" sz="2400" dirty="0"/>
           </a:p>
@@ -11784,7 +11784,7 @@
                 <a:ea typeface="Calibri" pitchFamily="34" charset="-122"/>
                 <a:cs typeface="Calibri" pitchFamily="34" charset="-120"/>
               </a:rPr>
-              <a:t>An armchair-shaped hollow with a steep back wall on the side of a mountain</a:t>
+              <a:t>A pointed peak where three hollows meet</a:t>
             </a:r>
             <a:endParaRPr lang="en-US" sz="1800" dirty="0"/>
           </a:p>
@@ -11821,7 +11821,7 @@
                 <a:ea typeface="Calibri" pitchFamily="34" charset="-122"/>
                 <a:cs typeface="Calibri" pitchFamily="34" charset="-120"/>
               </a:rPr>
-              <a:t>A pointed peak where three hollows meet</a:t>
+              <a:t>A knife-edged ridge between two hollows</a:t>
             </a:r>
             <a:endParaRPr lang="en-US" sz="1800" dirty="0"/>
           </a:p>
@@ -11858,7 +11858,7 @@
                 <a:ea typeface="Calibri" pitchFamily="34" charset="-122"/>
                 <a:cs typeface="Calibri" pitchFamily="34" charset="-120"/>
               </a:rPr>
-              <a:t>A knife-edged ridge between two hollows</a:t>
+              <a:t>An armchair-shaped hollow with a steep back wall, carved high on a mountainside</a:t>
             </a:r>
             <a:endParaRPr lang="en-US" sz="1800" dirty="0"/>
           </a:p>
@@ -13200,7 +13200,7 @@
                 <a:ea typeface="Cambria" pitchFamily="34" charset="-122"/>
                 <a:cs typeface="Cambria" pitchFamily="34" charset="-120"/>
               </a:rPr>
-              <a:t>D   An armchair-shaped hollow with a steep back wall on the side of a mountain</a:t>
+              <a:t>B   An armchair-shaped hollow with a steep back wall, carved high on a mountainside</a:t>
             </a:r>
             <a:endParaRPr lang="en-US" sz="1800" dirty="0"/>
           </a:p>
@@ -13721,7 +13721,7 @@
                 <a:ea typeface="Calibri" pitchFamily="34" charset="-122"/>
                 <a:cs typeface="Calibri" pitchFamily="34" charset="-120"/>
               </a:rPr>
-              <a:t>A   An armchair-shaped hollow with a steep back wall on the side of a mountain</a:t>
+              <a:t>C   An armchair-shaped hollow with a steep back wall, carved high on a mountainside</a:t>
             </a:r>
             <a:endParaRPr lang="en-US" sz="2200" dirty="0"/>
           </a:p>
